--- a/Lesson_development/Presentations/Intro.pptx
+++ b/Lesson_development/Presentations/Intro.pptx
@@ -5,7 +5,7 @@
     <p:sldMasterId id="2147483660" r:id="rId1"/>
   </p:sldMasterIdLst>
   <p:notesMasterIdLst>
-    <p:notesMasterId r:id="rId7"/>
+    <p:notesMasterId r:id="rId8"/>
   </p:notesMasterIdLst>
   <p:sldIdLst>
     <p:sldId id="313" r:id="rId2"/>
@@ -13,6 +13,7 @@
     <p:sldId id="315" r:id="rId4"/>
     <p:sldId id="316" r:id="rId5"/>
     <p:sldId id="317" r:id="rId6"/>
+    <p:sldId id="318" r:id="rId7"/>
   </p:sldIdLst>
   <p:sldSz cx="12192000" cy="6858000"/>
   <p:notesSz cx="6858000" cy="9144000"/>
@@ -128,6 +129,59 @@
     </p:ext>
   </p:extLst>
 </p:presentation>
+</file>
+
+<file path=ppt/revisionInfo.xml><?xml version="1.0" encoding="utf-8"?>
+<p1510:revInfo xmlns:a="http://schemas.openxmlformats.org/drawingml/2006/main" xmlns:r="http://schemas.openxmlformats.org/officeDocument/2006/relationships" xmlns:p1510="http://schemas.microsoft.com/office/powerpoint/2015/10/main">
+  <p1510:revLst>
+    <p1510:client id="{D224E321-BDB4-486E-9B3A-95C70B9DC86E}" v="1" dt="2026-08-27T12:35:34.426"/>
+  </p1510:revLst>
+</p1510:revInfo>
+</file>
+
+<file path=ppt/changesInfos/changesInfo1.xml><?xml version="1.0" encoding="utf-8"?>
+<pc:chgInfo xmlns:a="http://schemas.openxmlformats.org/drawingml/2006/main" xmlns:r="http://schemas.openxmlformats.org/officeDocument/2006/relationships" xmlns:ac="http://schemas.microsoft.com/office/drawing/2013/main/command" xmlns:pc="http://schemas.microsoft.com/office/powerpoint/2013/main/command">
+  <pc:docChgLst>
+    <pc:chgData name="Leila Iñigo de la Cruz" userId="fae4ed0d-52e1-4e8b-ac73-77e0b7235c9a" providerId="ADAL" clId="{1E9E03C1-E5D4-4BEC-8EBD-C4DD5262B379}"/>
+    <pc:docChg chg="addSld modSld">
+      <pc:chgData name="Leila Iñigo de la Cruz" userId="fae4ed0d-52e1-4e8b-ac73-77e0b7235c9a" providerId="ADAL" clId="{1E9E03C1-E5D4-4BEC-8EBD-C4DD5262B379}" dt="2026-08-27T12:36:02.392" v="29" actId="1076"/>
+      <pc:docMkLst>
+        <pc:docMk/>
+      </pc:docMkLst>
+      <pc:sldChg chg="addSp modSp add mod">
+        <pc:chgData name="Leila Iñigo de la Cruz" userId="fae4ed0d-52e1-4e8b-ac73-77e0b7235c9a" providerId="ADAL" clId="{1E9E03C1-E5D4-4BEC-8EBD-C4DD5262B379}" dt="2026-08-27T12:36:02.392" v="29" actId="1076"/>
+        <pc:sldMkLst>
+          <pc:docMk/>
+          <pc:sldMk cId="3650722268" sldId="318"/>
+        </pc:sldMkLst>
+        <pc:spChg chg="mod">
+          <ac:chgData name="Leila Iñigo de la Cruz" userId="fae4ed0d-52e1-4e8b-ac73-77e0b7235c9a" providerId="ADAL" clId="{1E9E03C1-E5D4-4BEC-8EBD-C4DD5262B379}" dt="2026-08-27T12:35:15.433" v="14" actId="1076"/>
+          <ac:spMkLst>
+            <pc:docMk/>
+            <pc:sldMk cId="3650722268" sldId="318"/>
+            <ac:spMk id="2" creationId="{DC4C838E-9A67-4F50-A20C-14201FB1A556}"/>
+          </ac:spMkLst>
+        </pc:spChg>
+        <pc:spChg chg="add mod">
+          <ac:chgData name="Leila Iñigo de la Cruz" userId="fae4ed0d-52e1-4e8b-ac73-77e0b7235c9a" providerId="ADAL" clId="{1E9E03C1-E5D4-4BEC-8EBD-C4DD5262B379}" dt="2026-08-27T12:36:00.345" v="28" actId="1076"/>
+          <ac:spMkLst>
+            <pc:docMk/>
+            <pc:sldMk cId="3650722268" sldId="318"/>
+            <ac:spMk id="4" creationId="{607898FB-D521-F955-4EFF-B45FDED2867C}"/>
+          </ac:spMkLst>
+        </pc:spChg>
+        <pc:picChg chg="add mod">
+          <ac:chgData name="Leila Iñigo de la Cruz" userId="fae4ed0d-52e1-4e8b-ac73-77e0b7235c9a" providerId="ADAL" clId="{1E9E03C1-E5D4-4BEC-8EBD-C4DD5262B379}" dt="2026-08-27T12:36:02.392" v="29" actId="1076"/>
+          <ac:picMkLst>
+            <pc:docMk/>
+            <pc:sldMk cId="3650722268" sldId="318"/>
+            <ac:picMk id="5" creationId="{4345FF79-A0AD-8627-D71F-B42267106958}"/>
+          </ac:picMkLst>
+        </pc:picChg>
+      </pc:sldChg>
+    </pc:docChg>
+  </pc:docChgLst>
+</pc:chgInfo>
 </file>
 
 <file path=ppt/notesMasters/notesMaster1.xml><?xml version="1.0" encoding="utf-8"?>
@@ -1208,6 +1262,151 @@
     <p:extLst>
       <p:ext uri="{BB962C8B-B14F-4D97-AF65-F5344CB8AC3E}">
         <p14:creationId xmlns:p14="http://schemas.microsoft.com/office/powerpoint/2010/main" val="1932001853"/>
+      </p:ext>
+    </p:extLst>
+  </p:cSld>
+  <p:clrMapOvr>
+    <a:masterClrMapping/>
+  </p:clrMapOvr>
+</p:notes>
+</file>
+
+<file path=ppt/notesSlides/notesSlide6.xml><?xml version="1.0" encoding="utf-8"?>
+<p:notes xmlns:a="http://schemas.openxmlformats.org/drawingml/2006/main" xmlns:r="http://schemas.openxmlformats.org/officeDocument/2006/relationships" xmlns:p="http://schemas.openxmlformats.org/presentationml/2006/main" showMasterSp="0" showMasterPhAnim="0">
+  <p:cSld>
+    <p:spTree>
+      <p:nvGrpSpPr>
+        <p:cNvPr id="1" name="Shape 1065">
+          <a:extLst>
+            <a:ext uri="{FF2B5EF4-FFF2-40B4-BE49-F238E27FC236}">
+              <a16:creationId xmlns:a16="http://schemas.microsoft.com/office/drawing/2014/main" id="{16CEECED-96B3-2BA6-020C-B7EAA90AD7BC}"/>
+            </a:ext>
+          </a:extLst>
+        </p:cNvPr>
+        <p:cNvGrpSpPr/>
+        <p:nvPr/>
+      </p:nvGrpSpPr>
+      <p:grpSpPr>
+        <a:xfrm>
+          <a:off x="0" y="0"/>
+          <a:ext cx="0" cy="0"/>
+          <a:chOff x="0" y="0"/>
+          <a:chExt cx="0" cy="0"/>
+        </a:xfrm>
+      </p:grpSpPr>
+      <p:sp>
+        <p:nvSpPr>
+          <p:cNvPr id="1066" name="Google Shape;1066;p43:notes">
+            <a:extLst>
+              <a:ext uri="{FF2B5EF4-FFF2-40B4-BE49-F238E27FC236}">
+                <a16:creationId xmlns:a16="http://schemas.microsoft.com/office/drawing/2014/main" id="{E88659B3-AF37-8D89-0553-3881A21B2ADB}"/>
+              </a:ext>
+            </a:extLst>
+          </p:cNvPr>
+          <p:cNvSpPr txBox="1">
+            <a:spLocks noGrp="1"/>
+          </p:cNvSpPr>
+          <p:nvPr>
+            <p:ph type="body" idx="1"/>
+          </p:nvPr>
+        </p:nvSpPr>
+        <p:spPr>
+          <a:xfrm>
+            <a:off x="685800" y="4400550"/>
+            <a:ext cx="5486400" cy="3600450"/>
+          </a:xfrm>
+          <a:prstGeom prst="rect">
+            <a:avLst/>
+          </a:prstGeom>
+          <a:noFill/>
+          <a:ln>
+            <a:noFill/>
+          </a:ln>
+        </p:spPr>
+        <p:txBody>
+          <a:bodyPr spcFirstLastPara="1" wrap="square" lIns="91425" tIns="45700" rIns="91425" bIns="45700" anchor="t" anchorCtr="0">
+            <a:noAutofit/>
+          </a:bodyPr>
+          <a:lstStyle/>
+          <a:p>
+            <a:pPr marL="0" lvl="0" indent="0" algn="l" rtl="0">
+              <a:lnSpc>
+                <a:spcPct val="100000"/>
+              </a:lnSpc>
+              <a:spcBef>
+                <a:spcPts val="0"/>
+              </a:spcBef>
+              <a:spcAft>
+                <a:spcPts val="0"/>
+              </a:spcAft>
+              <a:buSzPts val="1400"/>
+              <a:buNone/>
+            </a:pPr>
+            <a:endParaRPr/>
+          </a:p>
+        </p:txBody>
+      </p:sp>
+      <p:sp>
+        <p:nvSpPr>
+          <p:cNvPr id="1067" name="Google Shape;1067;p43:notes">
+            <a:extLst>
+              <a:ext uri="{FF2B5EF4-FFF2-40B4-BE49-F238E27FC236}">
+                <a16:creationId xmlns:a16="http://schemas.microsoft.com/office/drawing/2014/main" id="{C26FD5CB-CF34-BF4A-234F-8B1A403D2827}"/>
+              </a:ext>
+            </a:extLst>
+          </p:cNvPr>
+          <p:cNvSpPr>
+            <a:spLocks noGrp="1" noRot="1" noChangeAspect="1"/>
+          </p:cNvSpPr>
+          <p:nvPr>
+            <p:ph type="sldImg" idx="2"/>
+          </p:nvPr>
+        </p:nvSpPr>
+        <p:spPr>
+          <a:xfrm>
+            <a:off x="685800" y="1143000"/>
+            <a:ext cx="5486400" cy="3086100"/>
+          </a:xfrm>
+          <a:custGeom>
+            <a:avLst/>
+            <a:gdLst/>
+            <a:ahLst/>
+            <a:cxnLst/>
+            <a:rect l="l" t="t" r="r" b="b"/>
+            <a:pathLst>
+              <a:path w="120000" h="120000" extrusionOk="0">
+                <a:moveTo>
+                  <a:pt x="0" y="0"/>
+                </a:moveTo>
+                <a:lnTo>
+                  <a:pt x="120000" y="0"/>
+                </a:lnTo>
+                <a:lnTo>
+                  <a:pt x="120000" y="120000"/>
+                </a:lnTo>
+                <a:lnTo>
+                  <a:pt x="0" y="120000"/>
+                </a:lnTo>
+                <a:close/>
+              </a:path>
+            </a:pathLst>
+          </a:custGeom>
+          <a:noFill/>
+          <a:ln w="12700" cap="flat" cmpd="sng">
+            <a:solidFill>
+              <a:srgbClr val="000000"/>
+            </a:solidFill>
+            <a:prstDash val="solid"/>
+            <a:round/>
+            <a:headEnd type="none" w="sm" len="sm"/>
+            <a:tailEnd type="none" w="sm" len="sm"/>
+          </a:ln>
+        </p:spPr>
+      </p:sp>
+    </p:spTree>
+    <p:extLst>
+      <p:ext uri="{BB962C8B-B14F-4D97-AF65-F5344CB8AC3E}">
+        <p14:creationId xmlns:p14="http://schemas.microsoft.com/office/powerpoint/2010/main" val="3361113048"/>
       </p:ext>
     </p:extLst>
   </p:cSld>
@@ -13078,6 +13277,260 @@
 </p:sld>
 </file>
 
+<file path=ppt/slides/slide6.xml><?xml version="1.0" encoding="utf-8"?>
+<p:sld xmlns:a="http://schemas.openxmlformats.org/drawingml/2006/main" xmlns:r="http://schemas.openxmlformats.org/officeDocument/2006/relationships" xmlns:p="http://schemas.openxmlformats.org/presentationml/2006/main">
+  <p:cSld>
+    <p:bg>
+      <p:bgPr>
+        <a:solidFill>
+          <a:schemeClr val="accent3"/>
+        </a:solidFill>
+        <a:effectLst/>
+      </p:bgPr>
+    </p:bg>
+    <p:spTree>
+      <p:nvGrpSpPr>
+        <p:cNvPr id="1" name="Shape 1068">
+          <a:extLst>
+            <a:ext uri="{FF2B5EF4-FFF2-40B4-BE49-F238E27FC236}">
+              <a16:creationId xmlns:a16="http://schemas.microsoft.com/office/drawing/2014/main" id="{FEF2A692-93E2-071B-D4AF-5FD43D8E03CB}"/>
+            </a:ext>
+          </a:extLst>
+        </p:cNvPr>
+        <p:cNvGrpSpPr/>
+        <p:nvPr/>
+      </p:nvGrpSpPr>
+      <p:grpSpPr>
+        <a:xfrm>
+          <a:off x="0" y="0"/>
+          <a:ext cx="0" cy="0"/>
+          <a:chOff x="0" y="0"/>
+          <a:chExt cx="0" cy="0"/>
+        </a:xfrm>
+      </p:grpSpPr>
+      <p:sp>
+        <p:nvSpPr>
+          <p:cNvPr id="1070" name="Google Shape;1070;p43">
+            <a:extLst>
+              <a:ext uri="{FF2B5EF4-FFF2-40B4-BE49-F238E27FC236}">
+                <a16:creationId xmlns:a16="http://schemas.microsoft.com/office/drawing/2014/main" id="{122D2377-270E-A5E9-A5A7-A22745C3C697}"/>
+              </a:ext>
+            </a:extLst>
+          </p:cNvPr>
+          <p:cNvSpPr txBox="1">
+            <a:spLocks noGrp="1"/>
+          </p:cNvSpPr>
+          <p:nvPr>
+            <p:ph type="body" idx="2"/>
+          </p:nvPr>
+        </p:nvSpPr>
+        <p:spPr>
+          <a:xfrm>
+            <a:off x="177800" y="191039"/>
+            <a:ext cx="11763375" cy="2286000"/>
+          </a:xfrm>
+          <a:prstGeom prst="rect">
+            <a:avLst/>
+          </a:prstGeom>
+          <a:noFill/>
+          <a:ln>
+            <a:noFill/>
+          </a:ln>
+        </p:spPr>
+        <p:txBody>
+          <a:bodyPr spcFirstLastPara="1" wrap="square" lIns="91425" tIns="45700" rIns="91425" bIns="45700" anchor="ctr" anchorCtr="0">
+            <a:noAutofit/>
+          </a:bodyPr>
+          <a:lstStyle/>
+          <a:p>
+            <a:pPr marL="0" lvl="0" indent="0" algn="ctr" rtl="0">
+              <a:lnSpc>
+                <a:spcPct val="90000"/>
+              </a:lnSpc>
+              <a:spcBef>
+                <a:spcPts val="0"/>
+              </a:spcBef>
+              <a:spcAft>
+                <a:spcPts val="0"/>
+              </a:spcAft>
+              <a:buClr>
+                <a:schemeClr val="dk1"/>
+              </a:buClr>
+              <a:buSzPts val="6000"/>
+              <a:buNone/>
+            </a:pPr>
+            <a:r>
+              <a:rPr lang="en-US" sz="4000" dirty="0"/>
+              <a:t>Interoperability in Climate and Atmospheric sciences</a:t>
+            </a:r>
+            <a:endParaRPr sz="4000" dirty="0"/>
+          </a:p>
+        </p:txBody>
+      </p:sp>
+      <p:pic>
+        <p:nvPicPr>
+          <p:cNvPr id="1073" name="Google Shape;1073;p43" descr="Ein Bild, das Grafiken, Muster, Design enthält.&#10;&#10;KI-generierte Inhalte können fehlerhaft sein.">
+            <a:extLst>
+              <a:ext uri="{FF2B5EF4-FFF2-40B4-BE49-F238E27FC236}">
+                <a16:creationId xmlns:a16="http://schemas.microsoft.com/office/drawing/2014/main" id="{D55641EC-6FE6-BCD8-DF96-08B464F093F5}"/>
+              </a:ext>
+            </a:extLst>
+          </p:cNvPr>
+          <p:cNvPicPr preferRelativeResize="0"/>
+          <p:nvPr/>
+        </p:nvPicPr>
+        <p:blipFill rotWithShape="1">
+          <a:blip r:embed="rId3">
+            <a:alphaModFix/>
+          </a:blip>
+          <a:srcRect/>
+          <a:stretch/>
+        </p:blipFill>
+        <p:spPr>
+          <a:xfrm>
+            <a:off x="340277" y="260626"/>
+            <a:ext cx="752058" cy="752058"/>
+          </a:xfrm>
+          <a:prstGeom prst="rect">
+            <a:avLst/>
+          </a:prstGeom>
+          <a:noFill/>
+          <a:ln>
+            <a:noFill/>
+          </a:ln>
+        </p:spPr>
+      </p:pic>
+      <p:sp>
+        <p:nvSpPr>
+          <p:cNvPr id="2" name="TextBox 1">
+            <a:extLst>
+              <a:ext uri="{FF2B5EF4-FFF2-40B4-BE49-F238E27FC236}">
+                <a16:creationId xmlns:a16="http://schemas.microsoft.com/office/drawing/2014/main" id="{DC4C838E-9A67-4F50-A20C-14201FB1A556}"/>
+              </a:ext>
+            </a:extLst>
+          </p:cNvPr>
+          <p:cNvSpPr txBox="1"/>
+          <p:nvPr/>
+        </p:nvSpPr>
+        <p:spPr>
+          <a:xfrm>
+            <a:off x="4658166" y="2246206"/>
+            <a:ext cx="2302233" cy="461665"/>
+          </a:xfrm>
+          <a:prstGeom prst="rect">
+            <a:avLst/>
+          </a:prstGeom>
+          <a:noFill/>
+        </p:spPr>
+        <p:txBody>
+          <a:bodyPr wrap="none" rtlCol="0">
+            <a:spAutoFit/>
+          </a:bodyPr>
+          <a:lstStyle/>
+          <a:p>
+            <a:r>
+              <a:rPr lang="en-US" sz="2400" b="1" dirty="0"/>
+              <a:t>Who are you? </a:t>
+            </a:r>
+            <a:endParaRPr lang="nl-NL" sz="2400" b="1" dirty="0"/>
+          </a:p>
+        </p:txBody>
+      </p:sp>
+      <p:sp>
+        <p:nvSpPr>
+          <p:cNvPr id="4" name="TextBox 3">
+            <a:extLst>
+              <a:ext uri="{FF2B5EF4-FFF2-40B4-BE49-F238E27FC236}">
+                <a16:creationId xmlns:a16="http://schemas.microsoft.com/office/drawing/2014/main" id="{607898FB-D521-F955-4EFF-B45FDED2867C}"/>
+              </a:ext>
+            </a:extLst>
+          </p:cNvPr>
+          <p:cNvSpPr txBox="1"/>
+          <p:nvPr/>
+        </p:nvSpPr>
+        <p:spPr>
+          <a:xfrm>
+            <a:off x="2761282" y="3154962"/>
+            <a:ext cx="6096000" cy="369332"/>
+          </a:xfrm>
+          <a:prstGeom prst="rect">
+            <a:avLst/>
+          </a:prstGeom>
+          <a:noFill/>
+        </p:spPr>
+        <p:txBody>
+          <a:bodyPr wrap="square">
+            <a:spAutoFit/>
+          </a:bodyPr>
+          <a:lstStyle/>
+          <a:p>
+            <a:pPr algn="ctr"/>
+            <a:r>
+              <a:rPr lang="nl-NL" dirty="0">
+                <a:solidFill>
+                  <a:srgbClr val="FF0000"/>
+                </a:solidFill>
+                <a:hlinkClick r:id="rId4">
+                  <a:extLst>
+                    <a:ext uri="{A12FA001-AC4F-418D-AE19-62706E023703}">
+                      <ahyp:hlinkClr xmlns:ahyp="http://schemas.microsoft.com/office/drawing/2018/hyperlinkcolor" val="tx"/>
+                    </a:ext>
+                  </a:extLst>
+                </a:hlinkClick>
+              </a:rPr>
+              <a:t>https://vevox.app/#/m/144372812</a:t>
+            </a:r>
+            <a:endParaRPr lang="nl-NL" dirty="0">
+              <a:solidFill>
+                <a:srgbClr val="FF0000"/>
+              </a:solidFill>
+            </a:endParaRPr>
+          </a:p>
+        </p:txBody>
+      </p:sp>
+      <p:pic>
+        <p:nvPicPr>
+          <p:cNvPr id="5" name="Picture 4" descr="Session QR Code">
+            <a:extLst>
+              <a:ext uri="{FF2B5EF4-FFF2-40B4-BE49-F238E27FC236}">
+                <a16:creationId xmlns:a16="http://schemas.microsoft.com/office/drawing/2014/main" id="{4345FF79-A0AD-8627-D71F-B42267106958}"/>
+              </a:ext>
+            </a:extLst>
+          </p:cNvPr>
+          <p:cNvPicPr>
+            <a:picLocks noChangeAspect="1"/>
+          </p:cNvPicPr>
+          <p:nvPr/>
+        </p:nvPicPr>
+        <p:blipFill>
+          <a:blip r:embed="rId5"/>
+          <a:stretch>
+            <a:fillRect/>
+          </a:stretch>
+        </p:blipFill>
+        <p:spPr>
+          <a:xfrm>
+            <a:off x="4461494" y="3771361"/>
+            <a:ext cx="2695575" cy="2695575"/>
+          </a:xfrm>
+          <a:prstGeom prst="rect">
+            <a:avLst/>
+          </a:prstGeom>
+        </p:spPr>
+      </p:pic>
+    </p:spTree>
+    <p:extLst>
+      <p:ext uri="{BB962C8B-B14F-4D97-AF65-F5344CB8AC3E}">
+        <p14:creationId xmlns:p14="http://schemas.microsoft.com/office/powerpoint/2010/main" val="3650722268"/>
+      </p:ext>
+    </p:extLst>
+  </p:cSld>
+  <p:clrMapOvr>
+    <a:masterClrMapping/>
+  </p:clrMapOvr>
+</p:sld>
+</file>
+
 <file path=ppt/theme/theme1.xml><?xml version="1.0" encoding="utf-8"?>
 <a:theme xmlns:a="http://schemas.openxmlformats.org/drawingml/2006/main" name="Inbetween Title Slides">
   <a:themeElements>
